--- a/textbook/ppt/chapter04_ppt.pptx
+++ b/textbook/ppt/chapter04_ppt.pptx
@@ -7,6 +7,12 @@
   <p:sldIdLst>
     <p:sldId id="256" r:id="rId7"/>
     <p:sldId id="257" r:id="rId8"/>
+    <p:sldId id="258" r:id="rId9"/>
+    <p:sldId id="259" r:id="rId10"/>
+    <p:sldId id="260" r:id="rId11"/>
+    <p:sldId id="261" r:id="rId12"/>
+    <p:sldId id="262" r:id="rId13"/>
+    <p:sldId id="263" r:id="rId14"/>
   </p:sldIdLst>
   <p:sldSz cx="12188952" cy="6858000" type="screen4x3"/>
   <p:notesSz cx="6858000" cy="9144000"/>
@@ -3229,6 +3235,629 @@
             <a:r>
               <a:rPr sz="1800"/>
               <a:t>• 排序基础的基本概念与应用</a:t>
+            </a:r>
+          </a:p>
+        </p:txBody>
+      </p:sp>
+    </p:spTree>
+  </p:cSld>
+  <p:clrMapOvr>
+    <a:masterClrMapping/>
+  </p:clrMapOvr>
+</p:sld>
+</file>
+
+<file path=ppt/slides/slide3.xml><?xml version="1.0" encoding="utf-8"?>
+<p:sld xmlns:a="http://schemas.openxmlformats.org/drawingml/2006/main" xmlns:p="http://schemas.openxmlformats.org/presentationml/2006/main" xmlns:r="http://schemas.openxmlformats.org/officeDocument/2006/relationships">
+  <p:cSld>
+    <p:spTree>
+      <p:nvGrpSpPr>
+        <p:cNvPr id="1" name=""/>
+        <p:cNvGrpSpPr/>
+        <p:nvPr/>
+      </p:nvGrpSpPr>
+      <p:grpSpPr/>
+      <p:sp>
+        <p:nvSpPr>
+          <p:cNvPr id="2" name="TextBox 1"/>
+          <p:cNvSpPr txBox="1"/>
+          <p:nvPr/>
+        </p:nvSpPr>
+        <p:spPr>
+          <a:xfrm>
+            <a:off x="914400" y="457200"/>
+            <a:ext cx="10058400" cy="914400"/>
+          </a:xfrm>
+          <a:prstGeom prst="rect">
+            <a:avLst/>
+          </a:prstGeom>
+          <a:noFill/>
+        </p:spPr>
+        <p:txBody>
+          <a:bodyPr wrap="none">
+            <a:spAutoFit/>
+          </a:bodyPr>
+          <a:lstStyle/>
+          <a:p>
+            <a:r>
+              <a:rPr sz="2800" b="1">
+                <a:solidFill>
+                  <a:srgbClr val="8B0000"/>
+                </a:solidFill>
+              </a:rPr>
+              <a:t>本章概览</a:t>
+            </a:r>
+          </a:p>
+        </p:txBody>
+      </p:sp>
+      <p:sp>
+        <p:nvSpPr>
+          <p:cNvPr id="3" name="TextBox 2"/>
+          <p:cNvSpPr txBox="1"/>
+          <p:nvPr/>
+        </p:nvSpPr>
+        <p:spPr>
+          <a:xfrm>
+            <a:off x="914400" y="1371600"/>
+            <a:ext cx="10058400" cy="5029200"/>
+          </a:xfrm>
+          <a:prstGeom prst="rect">
+            <a:avLst/>
+          </a:prstGeom>
+          <a:noFill/>
+        </p:spPr>
+        <p:txBody>
+          <a:bodyPr wrap="none">
+            <a:spAutoFit/>
+          </a:bodyPr>
+          <a:lstStyle/>
+          <a:p/>
+          <a:p>
+            <a:r>
+              <a:rPr sz="1600">
+                <a:solidFill>
+                  <a:srgbClr val="000000"/>
+                </a:solidFill>
+              </a:rPr>
+              <a:t>数组 = 一排连续的盒子</a:t>
+            </a:r>
+          </a:p>
+          <a:p>
+            <a:r>
+              <a:rPr sz="1600">
+                <a:solidFill>
+                  <a:srgbClr val="000000"/>
+                </a:solidFill>
+              </a:rPr>
+              <a:t>下标从0开始（C++/Python）</a:t>
+            </a:r>
+          </a:p>
+          <a:p>
+            <a:r>
+              <a:rPr sz="1600">
+                <a:solidFill>
+                  <a:srgbClr val="000000"/>
+                </a:solidFill>
+              </a:rPr>
+              <a:t>遍历：for(i=0;i&lt;n;i++)访问每个元素</a:t>
+            </a:r>
+          </a:p>
+          <a:p>
+            <a:r>
+              <a:rPr sz="1600">
+                <a:solidFill>
+                  <a:srgbClr val="000000"/>
+                </a:solidFill>
+              </a:rPr>
+              <a:t>常见操作：求和、找最值、排序</a:t>
+            </a:r>
+          </a:p>
+        </p:txBody>
+      </p:sp>
+    </p:spTree>
+  </p:cSld>
+  <p:clrMapOvr>
+    <a:masterClrMapping/>
+  </p:clrMapOvr>
+</p:sld>
+</file>
+
+<file path=ppt/slides/slide4.xml><?xml version="1.0" encoding="utf-8"?>
+<p:sld xmlns:a="http://schemas.openxmlformats.org/drawingml/2006/main" xmlns:p="http://schemas.openxmlformats.org/presentationml/2006/main" xmlns:r="http://schemas.openxmlformats.org/officeDocument/2006/relationships">
+  <p:cSld>
+    <p:spTree>
+      <p:nvGrpSpPr>
+        <p:cNvPr id="1" name=""/>
+        <p:cNvGrpSpPr/>
+        <p:nvPr/>
+      </p:nvGrpSpPr>
+      <p:grpSpPr/>
+      <p:sp>
+        <p:nvSpPr>
+          <p:cNvPr id="2" name="TextBox 1"/>
+          <p:cNvSpPr txBox="1"/>
+          <p:nvPr/>
+        </p:nvSpPr>
+        <p:spPr>
+          <a:xfrm>
+            <a:off x="914400" y="457200"/>
+            <a:ext cx="10058400" cy="914400"/>
+          </a:xfrm>
+          <a:prstGeom prst="rect">
+            <a:avLst/>
+          </a:prstGeom>
+          <a:noFill/>
+        </p:spPr>
+        <p:txBody>
+          <a:bodyPr wrap="none">
+            <a:spAutoFit/>
+          </a:bodyPr>
+          <a:lstStyle/>
+          <a:p>
+            <a:r>
+              <a:rPr sz="2800" b="1">
+                <a:solidFill>
+                  <a:srgbClr val="8B0000"/>
+                </a:solidFill>
+              </a:rPr>
+              <a:t>C++ 代码示例</a:t>
+            </a:r>
+          </a:p>
+        </p:txBody>
+      </p:sp>
+      <p:sp>
+        <p:nvSpPr>
+          <p:cNvPr id="3" name="TextBox 2"/>
+          <p:cNvSpPr txBox="1"/>
+          <p:nvPr/>
+        </p:nvSpPr>
+        <p:spPr>
+          <a:xfrm>
+            <a:off x="914400" y="1371600"/>
+            <a:ext cx="10058400" cy="5029200"/>
+          </a:xfrm>
+          <a:prstGeom prst="rect">
+            <a:avLst/>
+          </a:prstGeom>
+          <a:noFill/>
+        </p:spPr>
+        <p:txBody>
+          <a:bodyPr wrap="none">
+            <a:spAutoFit/>
+          </a:bodyPr>
+          <a:lstStyle/>
+          <a:p/>
+          <a:p>
+            <a:r>
+              <a:rPr sz="1400">
+                <a:solidFill>
+                  <a:srgbClr val="000000"/>
+                </a:solidFill>
+              </a:rPr>
+              <a:t>int a[100];
+for (int i = 0; i &lt; n; i++) cin &gt;&gt; a[i];
+sort(a, a+n);</a:t>
+            </a:r>
+          </a:p>
+        </p:txBody>
+      </p:sp>
+    </p:spTree>
+  </p:cSld>
+  <p:clrMapOvr>
+    <a:masterClrMapping/>
+  </p:clrMapOvr>
+</p:sld>
+</file>
+
+<file path=ppt/slides/slide5.xml><?xml version="1.0" encoding="utf-8"?>
+<p:sld xmlns:a="http://schemas.openxmlformats.org/drawingml/2006/main" xmlns:p="http://schemas.openxmlformats.org/presentationml/2006/main" xmlns:r="http://schemas.openxmlformats.org/officeDocument/2006/relationships">
+  <p:cSld>
+    <p:spTree>
+      <p:nvGrpSpPr>
+        <p:cNvPr id="1" name=""/>
+        <p:cNvGrpSpPr/>
+        <p:nvPr/>
+      </p:nvGrpSpPr>
+      <p:grpSpPr/>
+      <p:sp>
+        <p:nvSpPr>
+          <p:cNvPr id="2" name="TextBox 1"/>
+          <p:cNvSpPr txBox="1"/>
+          <p:nvPr/>
+        </p:nvSpPr>
+        <p:spPr>
+          <a:xfrm>
+            <a:off x="914400" y="457200"/>
+            <a:ext cx="10058400" cy="914400"/>
+          </a:xfrm>
+          <a:prstGeom prst="rect">
+            <a:avLst/>
+          </a:prstGeom>
+          <a:noFill/>
+        </p:spPr>
+        <p:txBody>
+          <a:bodyPr wrap="none">
+            <a:spAutoFit/>
+          </a:bodyPr>
+          <a:lstStyle/>
+          <a:p>
+            <a:r>
+              <a:rPr sz="2800" b="1">
+                <a:solidFill>
+                  <a:srgbClr val="8B0000"/>
+                </a:solidFill>
+              </a:rPr>
+              <a:t>Python 代码示例</a:t>
+            </a:r>
+          </a:p>
+        </p:txBody>
+      </p:sp>
+      <p:sp>
+        <p:nvSpPr>
+          <p:cNvPr id="3" name="TextBox 2"/>
+          <p:cNvSpPr txBox="1"/>
+          <p:nvPr/>
+        </p:nvSpPr>
+        <p:spPr>
+          <a:xfrm>
+            <a:off x="914400" y="1371600"/>
+            <a:ext cx="10058400" cy="5029200"/>
+          </a:xfrm>
+          <a:prstGeom prst="rect">
+            <a:avLst/>
+          </a:prstGeom>
+          <a:noFill/>
+        </p:spPr>
+        <p:txBody>
+          <a:bodyPr wrap="none">
+            <a:spAutoFit/>
+          </a:bodyPr>
+          <a:lstStyle/>
+          <a:p/>
+          <a:p>
+            <a:r>
+              <a:rPr sz="1400">
+                <a:solidFill>
+                  <a:srgbClr val="000000"/>
+                </a:solidFill>
+              </a:rPr>
+              <a:t>a = list(map(int, input().split()))
+a.sort()</a:t>
+            </a:r>
+          </a:p>
+        </p:txBody>
+      </p:sp>
+    </p:spTree>
+  </p:cSld>
+  <p:clrMapOvr>
+    <a:masterClrMapping/>
+  </p:clrMapOvr>
+</p:sld>
+</file>
+
+<file path=ppt/slides/slide6.xml><?xml version="1.0" encoding="utf-8"?>
+<p:sld xmlns:a="http://schemas.openxmlformats.org/drawingml/2006/main" xmlns:p="http://schemas.openxmlformats.org/presentationml/2006/main" xmlns:r="http://schemas.openxmlformats.org/officeDocument/2006/relationships">
+  <p:cSld>
+    <p:spTree>
+      <p:nvGrpSpPr>
+        <p:cNvPr id="1" name=""/>
+        <p:cNvGrpSpPr/>
+        <p:nvPr/>
+      </p:nvGrpSpPr>
+      <p:grpSpPr/>
+      <p:sp>
+        <p:nvSpPr>
+          <p:cNvPr id="2" name="TextBox 1"/>
+          <p:cNvSpPr txBox="1"/>
+          <p:nvPr/>
+        </p:nvSpPr>
+        <p:spPr>
+          <a:xfrm>
+            <a:off x="914400" y="457200"/>
+            <a:ext cx="10058400" cy="914400"/>
+          </a:xfrm>
+          <a:prstGeom prst="rect">
+            <a:avLst/>
+          </a:prstGeom>
+          <a:noFill/>
+        </p:spPr>
+        <p:txBody>
+          <a:bodyPr wrap="none">
+            <a:spAutoFit/>
+          </a:bodyPr>
+          <a:lstStyle/>
+          <a:p>
+            <a:r>
+              <a:rPr sz="2800" b="1">
+                <a:solidFill>
+                  <a:srgbClr val="8B0000"/>
+                </a:solidFill>
+              </a:rPr>
+              <a:t>常见错误</a:t>
+            </a:r>
+          </a:p>
+        </p:txBody>
+      </p:sp>
+      <p:sp>
+        <p:nvSpPr>
+          <p:cNvPr id="3" name="TextBox 2"/>
+          <p:cNvSpPr txBox="1"/>
+          <p:nvPr/>
+        </p:nvSpPr>
+        <p:spPr>
+          <a:xfrm>
+            <a:off x="914400" y="1371600"/>
+            <a:ext cx="10058400" cy="5029200"/>
+          </a:xfrm>
+          <a:prstGeom prst="rect">
+            <a:avLst/>
+          </a:prstGeom>
+          <a:noFill/>
+        </p:spPr>
+        <p:txBody>
+          <a:bodyPr wrap="none">
+            <a:spAutoFit/>
+          </a:bodyPr>
+          <a:lstStyle/>
+          <a:p/>
+          <a:p>
+            <a:r>
+              <a:rPr sz="1600">
+                <a:solidFill>
+                  <a:srgbClr val="000000"/>
+                </a:solidFill>
+              </a:rPr>
+              <a:t>数组越界：a[n]是非法访问</a:t>
+            </a:r>
+          </a:p>
+          <a:p>
+            <a:r>
+              <a:rPr sz="1600">
+                <a:solidFill>
+                  <a:srgbClr val="000000"/>
+                </a:solidFill>
+              </a:rPr>
+              <a:t>忘记初始化数组</a:t>
+            </a:r>
+          </a:p>
+          <a:p>
+            <a:r>
+              <a:rPr sz="1600">
+                <a:solidFill>
+                  <a:srgbClr val="000000"/>
+                </a:solidFill>
+              </a:rPr>
+              <a:t>Python列表和C++数组的区别</a:t>
+            </a:r>
+          </a:p>
+          <a:p>
+            <a:r>
+              <a:rPr sz="1600">
+                <a:solidFill>
+                  <a:srgbClr val="000000"/>
+                </a:solidFill>
+              </a:rPr>
+              <a:t>sort()是原地排序，sorted()返回新列表</a:t>
+            </a:r>
+          </a:p>
+        </p:txBody>
+      </p:sp>
+    </p:spTree>
+  </p:cSld>
+  <p:clrMapOvr>
+    <a:masterClrMapping/>
+  </p:clrMapOvr>
+</p:sld>
+</file>
+
+<file path=ppt/slides/slide7.xml><?xml version="1.0" encoding="utf-8"?>
+<p:sld xmlns:a="http://schemas.openxmlformats.org/drawingml/2006/main" xmlns:p="http://schemas.openxmlformats.org/presentationml/2006/main" xmlns:r="http://schemas.openxmlformats.org/officeDocument/2006/relationships">
+  <p:cSld>
+    <p:spTree>
+      <p:nvGrpSpPr>
+        <p:cNvPr id="1" name=""/>
+        <p:cNvGrpSpPr/>
+        <p:nvPr/>
+      </p:nvGrpSpPr>
+      <p:grpSpPr/>
+      <p:sp>
+        <p:nvSpPr>
+          <p:cNvPr id="2" name="TextBox 1"/>
+          <p:cNvSpPr txBox="1"/>
+          <p:nvPr/>
+        </p:nvSpPr>
+        <p:spPr>
+          <a:xfrm>
+            <a:off x="914400" y="457200"/>
+            <a:ext cx="10058400" cy="914400"/>
+          </a:xfrm>
+          <a:prstGeom prst="rect">
+            <a:avLst/>
+          </a:prstGeom>
+          <a:noFill/>
+        </p:spPr>
+        <p:txBody>
+          <a:bodyPr wrap="none">
+            <a:spAutoFit/>
+          </a:bodyPr>
+          <a:lstStyle/>
+          <a:p>
+            <a:r>
+              <a:rPr sz="2800" b="1">
+                <a:solidFill>
+                  <a:srgbClr val="8B0000"/>
+                </a:solidFill>
+              </a:rPr>
+              <a:t>练习题目</a:t>
+            </a:r>
+          </a:p>
+        </p:txBody>
+      </p:sp>
+      <p:sp>
+        <p:nvSpPr>
+          <p:cNvPr id="3" name="TextBox 2"/>
+          <p:cNvSpPr txBox="1"/>
+          <p:nvPr/>
+        </p:nvSpPr>
+        <p:spPr>
+          <a:xfrm>
+            <a:off x="914400" y="1371600"/>
+            <a:ext cx="10058400" cy="5029200"/>
+          </a:xfrm>
+          <a:prstGeom prst="rect">
+            <a:avLst/>
+          </a:prstGeom>
+          <a:noFill/>
+        </p:spPr>
+        <p:txBody>
+          <a:bodyPr wrap="none">
+            <a:spAutoFit/>
+          </a:bodyPr>
+          <a:lstStyle/>
+          <a:p/>
+          <a:p>
+            <a:r>
+              <a:rPr sz="1600">
+                <a:solidFill>
+                  <a:srgbClr val="000000"/>
+                </a:solidFill>
+              </a:rPr>
+              <a:t>JD043 正剑除邪</a:t>
+            </a:r>
+          </a:p>
+          <a:p>
+            <a:r>
+              <a:rPr sz="1600">
+                <a:solidFill>
+                  <a:srgbClr val="000000"/>
+                </a:solidFill>
+              </a:rPr>
+              <a:t>JD047 剑锋所指</a:t>
+            </a:r>
+          </a:p>
+          <a:p>
+            <a:r>
+              <a:rPr sz="1600">
+                <a:solidFill>
+                  <a:srgbClr val="000000"/>
+                </a:solidFill>
+              </a:rPr>
+              <a:t>JD050 列阵求和</a:t>
+            </a:r>
+          </a:p>
+        </p:txBody>
+      </p:sp>
+    </p:spTree>
+  </p:cSld>
+  <p:clrMapOvr>
+    <a:masterClrMapping/>
+  </p:clrMapOvr>
+</p:sld>
+</file>
+
+<file path=ppt/slides/slide8.xml><?xml version="1.0" encoding="utf-8"?>
+<p:sld xmlns:a="http://schemas.openxmlformats.org/drawingml/2006/main" xmlns:p="http://schemas.openxmlformats.org/presentationml/2006/main" xmlns:r="http://schemas.openxmlformats.org/officeDocument/2006/relationships">
+  <p:cSld>
+    <p:spTree>
+      <p:nvGrpSpPr>
+        <p:cNvPr id="1" name=""/>
+        <p:cNvGrpSpPr/>
+        <p:nvPr/>
+      </p:nvGrpSpPr>
+      <p:grpSpPr/>
+      <p:sp>
+        <p:nvSpPr>
+          <p:cNvPr id="2" name="TextBox 1"/>
+          <p:cNvSpPr txBox="1"/>
+          <p:nvPr/>
+        </p:nvSpPr>
+        <p:spPr>
+          <a:xfrm>
+            <a:off x="914400" y="457200"/>
+            <a:ext cx="10058400" cy="914400"/>
+          </a:xfrm>
+          <a:prstGeom prst="rect">
+            <a:avLst/>
+          </a:prstGeom>
+          <a:noFill/>
+        </p:spPr>
+        <p:txBody>
+          <a:bodyPr wrap="none">
+            <a:spAutoFit/>
+          </a:bodyPr>
+          <a:lstStyle/>
+          <a:p>
+            <a:r>
+              <a:rPr sz="2800" b="1">
+                <a:solidFill>
+                  <a:srgbClr val="8B0000"/>
+                </a:solidFill>
+              </a:rPr>
+              <a:t>本章小结</a:t>
+            </a:r>
+          </a:p>
+        </p:txBody>
+      </p:sp>
+      <p:sp>
+        <p:nvSpPr>
+          <p:cNvPr id="3" name="TextBox 2"/>
+          <p:cNvSpPr txBox="1"/>
+          <p:nvPr/>
+        </p:nvSpPr>
+        <p:spPr>
+          <a:xfrm>
+            <a:off x="914400" y="1371600"/>
+            <a:ext cx="10058400" cy="5029200"/>
+          </a:xfrm>
+          <a:prstGeom prst="rect">
+            <a:avLst/>
+          </a:prstGeom>
+          <a:noFill/>
+        </p:spPr>
+        <p:txBody>
+          <a:bodyPr wrap="none">
+            <a:spAutoFit/>
+          </a:bodyPr>
+          <a:lstStyle/>
+          <a:p/>
+          <a:p>
+            <a:r>
+              <a:rPr sz="1600">
+                <a:solidFill>
+                  <a:srgbClr val="000000"/>
+                </a:solidFill>
+              </a:rPr>
+              <a:t>掌握核心概念</a:t>
+            </a:r>
+          </a:p>
+          <a:p>
+            <a:r>
+              <a:rPr sz="1600">
+                <a:solidFill>
+                  <a:srgbClr val="000000"/>
+                </a:solidFill>
+              </a:rPr>
+              <a:t>多做练习</a:t>
+            </a:r>
+          </a:p>
+          <a:p>
+            <a:r>
+              <a:rPr sz="1600">
+                <a:solidFill>
+                  <a:srgbClr val="000000"/>
+                </a:solidFill>
+              </a:rPr>
+              <a:t>注意边界条件</a:t>
+            </a:r>
+          </a:p>
+          <a:p>
+            <a:r>
+              <a:rPr sz="1600">
+                <a:solidFill>
+                  <a:srgbClr val="000000"/>
+                </a:solidFill>
+              </a:rPr>
+              <a:t>理解算法思想而非死记代码</a:t>
             </a:r>
           </a:p>
         </p:txBody>

--- a/textbook/ppt/chapter04_ppt.pptx
+++ b/textbook/ppt/chapter04_ppt.pptx
@@ -12,7 +12,6 @@
     <p:sldId id="260" r:id="rId11"/>
     <p:sldId id="261" r:id="rId12"/>
     <p:sldId id="262" r:id="rId13"/>
-    <p:sldId id="263" r:id="rId14"/>
   </p:sldIdLst>
   <p:sldSz cx="12188952" cy="6858000" type="screen4x3"/>
   <p:notesSz cx="6858000" cy="9144000"/>
@@ -3124,18 +3123,7 @@
                   <a:srgbClr val="8B0000"/>
                 </a:solidFill>
               </a:rPr>
-              <a:t>第4章 排兵布阵</a:t>
-            </a:r>
-          </a:p>
-          <a:p>
-            <a:pPr algn="ctr"/>
-            <a:r>
-              <a:rPr sz="2400">
-                <a:solidFill>
-                  <a:srgbClr val="6B5D4D"/>
-                </a:solidFill>
-              </a:rPr>
-              <a:t>数组</a:t>
+              <a:t>第4章</a:t>
             </a:r>
           </a:p>
         </p:txBody>
@@ -3166,8 +3154,8 @@
         </p:nvSpPr>
         <p:spPr>
           <a:xfrm>
-            <a:off x="914400" y="457200"/>
-            <a:ext cx="10058400" cy="914400"/>
+            <a:off x="457200" y="274320"/>
+            <a:ext cx="10972800" cy="731520"/>
           </a:xfrm>
           <a:prstGeom prst="rect">
             <a:avLst/>
@@ -3181,7 +3169,7 @@
           <a:lstStyle/>
           <a:p>
             <a:r>
-              <a:rPr sz="2800" b="1">
+              <a:rPr sz="2400" b="1">
                 <a:solidFill>
                   <a:srgbClr val="8B0000"/>
                 </a:solidFill>
@@ -3199,8 +3187,8 @@
         </p:nvSpPr>
         <p:spPr>
           <a:xfrm>
-            <a:off x="914400" y="1371600"/>
-            <a:ext cx="10058400" cy="4572000"/>
+            <a:off x="457200" y="1097280"/>
+            <a:ext cx="10972800" cy="5029200"/>
           </a:xfrm>
           <a:prstGeom prst="rect">
             <a:avLst/>
@@ -3215,26 +3203,42 @@
           <a:p/>
           <a:p>
             <a:r>
-              <a:rPr sz="1800"/>
-              <a:t>• 数组声明与访问的基本概念与应用</a:t>
-            </a:r>
-          </a:p>
-          <a:p>
-            <a:r>
-              <a:rPr sz="1800"/>
-              <a:t>• 遍历与修改的基本概念与应用</a:t>
-            </a:r>
-          </a:p>
-          <a:p>
-            <a:r>
-              <a:rPr sz="1800"/>
-              <a:t>• 斐波那契数列的基本概念与应用</a:t>
-            </a:r>
-          </a:p>
-          <a:p>
-            <a:r>
-              <a:rPr sz="1800"/>
-              <a:t>• 排序基础的基本概念与应用</a:t>
+              <a:rPr sz="1400">
+                <a:solidFill>
+                  <a:srgbClr val="000000"/>
+                </a:solidFill>
+              </a:rPr>
+              <a:t>数组 = 一排连续编号的盒子</a:t>
+            </a:r>
+          </a:p>
+          <a:p>
+            <a:r>
+              <a:rPr sz="1400">
+                <a:solidFill>
+                  <a:srgbClr val="000000"/>
+                </a:solidFill>
+              </a:rPr>
+              <a:t>下标从 0 开始：a[0] 是第一个元素</a:t>
+            </a:r>
+          </a:p>
+          <a:p>
+            <a:r>
+              <a:rPr sz="1400">
+                <a:solidFill>
+                  <a:srgbClr val="000000"/>
+                </a:solidFill>
+              </a:rPr>
+              <a:t>遍历：用 for 循环访问每个元素</a:t>
+            </a:r>
+          </a:p>
+          <a:p>
+            <a:r>
+              <a:rPr sz="1400">
+                <a:solidFill>
+                  <a:srgbClr val="000000"/>
+                </a:solidFill>
+              </a:rPr>
+              <a:t>常见操作：求和、找最值、排序</a:t>
             </a:r>
           </a:p>
         </p:txBody>
@@ -3265,8 +3269,8 @@
         </p:nvSpPr>
         <p:spPr>
           <a:xfrm>
-            <a:off x="914400" y="457200"/>
-            <a:ext cx="10058400" cy="914400"/>
+            <a:off x="457200" y="274320"/>
+            <a:ext cx="10972800" cy="731520"/>
           </a:xfrm>
           <a:prstGeom prst="rect">
             <a:avLst/>
@@ -3280,12 +3284,12 @@
           <a:lstStyle/>
           <a:p>
             <a:r>
-              <a:rPr sz="2800" b="1">
+              <a:rPr sz="2400" b="1">
                 <a:solidFill>
                   <a:srgbClr val="8B0000"/>
                 </a:solidFill>
               </a:rPr>
-              <a:t>本章概览</a:t>
+              <a:t>C++ 代码示例</a:t>
             </a:r>
           </a:p>
         </p:txBody>
@@ -3298,8 +3302,8 @@
         </p:nvSpPr>
         <p:spPr>
           <a:xfrm>
-            <a:off x="914400" y="1371600"/>
-            <a:ext cx="10058400" cy="5029200"/>
+            <a:off x="457200" y="1097280"/>
+            <a:ext cx="10972800" cy="5029200"/>
           </a:xfrm>
           <a:prstGeom prst="rect">
             <a:avLst/>
@@ -3314,42 +3318,18 @@
           <a:p/>
           <a:p>
             <a:r>
-              <a:rPr sz="1600">
+              <a:rPr sz="1200">
                 <a:solidFill>
                   <a:srgbClr val="000000"/>
                 </a:solidFill>
               </a:rPr>
-              <a:t>数组 = 一排连续的盒子</a:t>
-            </a:r>
-          </a:p>
-          <a:p>
-            <a:r>
-              <a:rPr sz="1600">
-                <a:solidFill>
-                  <a:srgbClr val="000000"/>
-                </a:solidFill>
-              </a:rPr>
-              <a:t>下标从0开始（C++/Python）</a:t>
-            </a:r>
-          </a:p>
-          <a:p>
-            <a:r>
-              <a:rPr sz="1600">
-                <a:solidFill>
-                  <a:srgbClr val="000000"/>
-                </a:solidFill>
-              </a:rPr>
-              <a:t>遍历：for(i=0;i&lt;n;i++)访问每个元素</a:t>
-            </a:r>
-          </a:p>
-          <a:p>
-            <a:r>
-              <a:rPr sz="1600">
-                <a:solidFill>
-                  <a:srgbClr val="000000"/>
-                </a:solidFill>
-              </a:rPr>
-              <a:t>常见操作：求和、找最值、排序</a:t>
+              <a:t>int a[100];
+for (int i = 0; i &lt; n; i++) cin &gt;&gt; a[i];
+// 求和
+int sum = 0;
+for (int i = 0; i &lt; n; i++) sum += a[i];
+// 排序
+sort(a, a + n);</a:t>
             </a:r>
           </a:p>
         </p:txBody>
@@ -3380,8 +3360,8 @@
         </p:nvSpPr>
         <p:spPr>
           <a:xfrm>
-            <a:off x="914400" y="457200"/>
-            <a:ext cx="10058400" cy="914400"/>
+            <a:off x="457200" y="274320"/>
+            <a:ext cx="10972800" cy="731520"/>
           </a:xfrm>
           <a:prstGeom prst="rect">
             <a:avLst/>
@@ -3395,12 +3375,12 @@
           <a:lstStyle/>
           <a:p>
             <a:r>
-              <a:rPr sz="2800" b="1">
+              <a:rPr sz="2400" b="1">
                 <a:solidFill>
                   <a:srgbClr val="8B0000"/>
                 </a:solidFill>
               </a:rPr>
-              <a:t>C++ 代码示例</a:t>
+              <a:t>Python 代码示例</a:t>
             </a:r>
           </a:p>
         </p:txBody>
@@ -3413,8 +3393,8 @@
         </p:nvSpPr>
         <p:spPr>
           <a:xfrm>
-            <a:off x="914400" y="1371600"/>
-            <a:ext cx="10058400" cy="5029200"/>
+            <a:off x="457200" y="1097280"/>
+            <a:ext cx="10972800" cy="5029200"/>
           </a:xfrm>
           <a:prstGeom prst="rect">
             <a:avLst/>
@@ -3429,14 +3409,16 @@
           <a:p/>
           <a:p>
             <a:r>
-              <a:rPr sz="1400">
+              <a:rPr sz="1200">
                 <a:solidFill>
                   <a:srgbClr val="000000"/>
                 </a:solidFill>
               </a:rPr>
-              <a:t>int a[100];
-for (int i = 0; i &lt; n; i++) cin &gt;&gt; a[i];
-sort(a, a+n);</a:t>
+              <a:t>a = list(map(int, input().split()))
+# 求和
+total = sum(a)
+# 排序
+a.sort()</a:t>
             </a:r>
           </a:p>
         </p:txBody>
@@ -3467,8 +3449,8 @@
         </p:nvSpPr>
         <p:spPr>
           <a:xfrm>
-            <a:off x="914400" y="457200"/>
-            <a:ext cx="10058400" cy="914400"/>
+            <a:off x="457200" y="274320"/>
+            <a:ext cx="10972800" cy="731520"/>
           </a:xfrm>
           <a:prstGeom prst="rect">
             <a:avLst/>
@@ -3482,12 +3464,12 @@
           <a:lstStyle/>
           <a:p>
             <a:r>
-              <a:rPr sz="2800" b="1">
+              <a:rPr sz="2400" b="1">
                 <a:solidFill>
                   <a:srgbClr val="8B0000"/>
                 </a:solidFill>
               </a:rPr>
-              <a:t>Python 代码示例</a:t>
+              <a:t>常见错误</a:t>
             </a:r>
           </a:p>
         </p:txBody>
@@ -3500,8 +3482,8 @@
         </p:nvSpPr>
         <p:spPr>
           <a:xfrm>
-            <a:off x="914400" y="1371600"/>
-            <a:ext cx="10058400" cy="5029200"/>
+            <a:off x="457200" y="1097280"/>
+            <a:ext cx="10972800" cy="5029200"/>
           </a:xfrm>
           <a:prstGeom prst="rect">
             <a:avLst/>
@@ -3521,8 +3503,37 @@
                   <a:srgbClr val="000000"/>
                 </a:solidFill>
               </a:rPr>
-              <a:t>a = list(map(int, input().split()))
-a.sort()</a:t>
+              <a:t>数组越界：a[n] 是未定义行为！</a:t>
+            </a:r>
+          </a:p>
+          <a:p>
+            <a:r>
+              <a:rPr sz="1400">
+                <a:solidFill>
+                  <a:srgbClr val="000000"/>
+                </a:solidFill>
+              </a:rPr>
+              <a:t>忘记初始化数组（C++默认随机值）</a:t>
+            </a:r>
+          </a:p>
+          <a:p>
+            <a:r>
+              <a:rPr sz="1400">
+                <a:solidFill>
+                  <a:srgbClr val="000000"/>
+                </a:solidFill>
+              </a:rPr>
+              <a:t>Python list 是动态数组，C++ 数组大小固定</a:t>
+            </a:r>
+          </a:p>
+          <a:p>
+            <a:r>
+              <a:rPr sz="1400">
+                <a:solidFill>
+                  <a:srgbClr val="000000"/>
+                </a:solidFill>
+              </a:rPr>
+              <a:t>sort() 是原地排序，sorted() 返回新列表</a:t>
             </a:r>
           </a:p>
         </p:txBody>
@@ -3553,8 +3564,8 @@
         </p:nvSpPr>
         <p:spPr>
           <a:xfrm>
-            <a:off x="914400" y="457200"/>
-            <a:ext cx="10058400" cy="914400"/>
+            <a:off x="457200" y="274320"/>
+            <a:ext cx="10972800" cy="731520"/>
           </a:xfrm>
           <a:prstGeom prst="rect">
             <a:avLst/>
@@ -3568,12 +3579,12 @@
           <a:lstStyle/>
           <a:p>
             <a:r>
-              <a:rPr sz="2800" b="1">
+              <a:rPr sz="2400" b="1">
                 <a:solidFill>
                   <a:srgbClr val="8B0000"/>
                 </a:solidFill>
               </a:rPr>
-              <a:t>常见错误</a:t>
+              <a:t>练习题目</a:t>
             </a:r>
           </a:p>
         </p:txBody>
@@ -3586,8 +3597,8 @@
         </p:nvSpPr>
         <p:spPr>
           <a:xfrm>
-            <a:off x="914400" y="1371600"/>
-            <a:ext cx="10058400" cy="5029200"/>
+            <a:off x="457200" y="1097280"/>
+            <a:ext cx="10972800" cy="5029200"/>
           </a:xfrm>
           <a:prstGeom prst="rect">
             <a:avLst/>
@@ -3602,42 +3613,32 @@
           <a:p/>
           <a:p>
             <a:r>
-              <a:rPr sz="1600">
+              <a:rPr sz="1400">
                 <a:solidFill>
                   <a:srgbClr val="000000"/>
                 </a:solidFill>
               </a:rPr>
-              <a:t>数组越界：a[n]是非法访问</a:t>
-            </a:r>
-          </a:p>
-          <a:p>
-            <a:r>
-              <a:rPr sz="1600">
+              <a:t>JD043 正剑除邪 - 数组替换 (Easy)</a:t>
+            </a:r>
+          </a:p>
+          <a:p>
+            <a:r>
+              <a:rPr sz="1400">
                 <a:solidFill>
                   <a:srgbClr val="000000"/>
                 </a:solidFill>
               </a:rPr>
-              <a:t>忘记初始化数组</a:t>
-            </a:r>
-          </a:p>
-          <a:p>
-            <a:r>
-              <a:rPr sz="1600">
+              <a:t>JD047 剑锋所指 - 数组遍历 (Easy)</a:t>
+            </a:r>
+          </a:p>
+          <a:p>
+            <a:r>
+              <a:rPr sz="1400">
                 <a:solidFill>
                   <a:srgbClr val="000000"/>
                 </a:solidFill>
               </a:rPr>
-              <a:t>Python列表和C++数组的区别</a:t>
-            </a:r>
-          </a:p>
-          <a:p>
-            <a:r>
-              <a:rPr sz="1600">
-                <a:solidFill>
-                  <a:srgbClr val="000000"/>
-                </a:solidFill>
-              </a:rPr>
-              <a:t>sort()是原地排序，sorted()返回新列表</a:t>
+              <a:t>JD050 列阵求和 - 数组求和 (Medium)</a:t>
             </a:r>
           </a:p>
         </p:txBody>
@@ -3668,8 +3669,8 @@
         </p:nvSpPr>
         <p:spPr>
           <a:xfrm>
-            <a:off x="914400" y="457200"/>
-            <a:ext cx="10058400" cy="914400"/>
+            <a:off x="457200" y="274320"/>
+            <a:ext cx="10972800" cy="731520"/>
           </a:xfrm>
           <a:prstGeom prst="rect">
             <a:avLst/>
@@ -3683,12 +3684,12 @@
           <a:lstStyle/>
           <a:p>
             <a:r>
-              <a:rPr sz="2800" b="1">
+              <a:rPr sz="2400" b="1">
                 <a:solidFill>
                   <a:srgbClr val="8B0000"/>
                 </a:solidFill>
               </a:rPr>
-              <a:t>练习题目</a:t>
+              <a:t>本章小结</a:t>
             </a:r>
           </a:p>
         </p:txBody>
@@ -3701,8 +3702,8 @@
         </p:nvSpPr>
         <p:spPr>
           <a:xfrm>
-            <a:off x="914400" y="1371600"/>
-            <a:ext cx="10058400" cy="5029200"/>
+            <a:off x="457200" y="1097280"/>
+            <a:ext cx="10972800" cy="5029200"/>
           </a:xfrm>
           <a:prstGeom prst="rect">
             <a:avLst/>
@@ -3717,147 +3718,42 @@
           <a:p/>
           <a:p>
             <a:r>
-              <a:rPr sz="1600">
+              <a:rPr sz="1400">
                 <a:solidFill>
                   <a:srgbClr val="000000"/>
                 </a:solidFill>
               </a:rPr>
-              <a:t>JD043 正剑除邪</a:t>
-            </a:r>
-          </a:p>
-          <a:p>
-            <a:r>
-              <a:rPr sz="1600">
+              <a:t>本章学习了第4章的核心概念</a:t>
+            </a:r>
+          </a:p>
+          <a:p>
+            <a:r>
+              <a:rPr sz="1400">
                 <a:solidFill>
                   <a:srgbClr val="000000"/>
                 </a:solidFill>
               </a:rPr>
-              <a:t>JD047 剑锋所指</a:t>
-            </a:r>
-          </a:p>
-          <a:p>
-            <a:r>
-              <a:rPr sz="1600">
+              <a:t>多做练习是掌握算法的关键</a:t>
+            </a:r>
+          </a:p>
+          <a:p>
+            <a:r>
+              <a:rPr sz="1400">
                 <a:solidFill>
                   <a:srgbClr val="000000"/>
                 </a:solidFill>
               </a:rPr>
-              <a:t>JD050 列阵求和</a:t>
-            </a:r>
-          </a:p>
-        </p:txBody>
-      </p:sp>
-    </p:spTree>
-  </p:cSld>
-  <p:clrMapOvr>
-    <a:masterClrMapping/>
-  </p:clrMapOvr>
-</p:sld>
-</file>
-
-<file path=ppt/slides/slide8.xml><?xml version="1.0" encoding="utf-8"?>
-<p:sld xmlns:a="http://schemas.openxmlformats.org/drawingml/2006/main" xmlns:p="http://schemas.openxmlformats.org/presentationml/2006/main" xmlns:r="http://schemas.openxmlformats.org/officeDocument/2006/relationships">
-  <p:cSld>
-    <p:spTree>
-      <p:nvGrpSpPr>
-        <p:cNvPr id="1" name=""/>
-        <p:cNvGrpSpPr/>
-        <p:nvPr/>
-      </p:nvGrpSpPr>
-      <p:grpSpPr/>
-      <p:sp>
-        <p:nvSpPr>
-          <p:cNvPr id="2" name="TextBox 1"/>
-          <p:cNvSpPr txBox="1"/>
-          <p:nvPr/>
-        </p:nvSpPr>
-        <p:spPr>
-          <a:xfrm>
-            <a:off x="914400" y="457200"/>
-            <a:ext cx="10058400" cy="914400"/>
-          </a:xfrm>
-          <a:prstGeom prst="rect">
-            <a:avLst/>
-          </a:prstGeom>
-          <a:noFill/>
-        </p:spPr>
-        <p:txBody>
-          <a:bodyPr wrap="none">
-            <a:spAutoFit/>
-          </a:bodyPr>
-          <a:lstStyle/>
-          <a:p>
-            <a:r>
-              <a:rPr sz="2800" b="1">
-                <a:solidFill>
-                  <a:srgbClr val="8B0000"/>
+              <a:t>理解算法思想比死记代码更重要</a:t>
+            </a:r>
+          </a:p>
+          <a:p>
+            <a:r>
+              <a:rPr sz="1400">
+                <a:solidFill>
+                  <a:srgbClr val="000000"/>
                 </a:solidFill>
               </a:rPr>
-              <a:t>本章小结</a:t>
-            </a:r>
-          </a:p>
-        </p:txBody>
-      </p:sp>
-      <p:sp>
-        <p:nvSpPr>
-          <p:cNvPr id="3" name="TextBox 2"/>
-          <p:cNvSpPr txBox="1"/>
-          <p:nvPr/>
-        </p:nvSpPr>
-        <p:spPr>
-          <a:xfrm>
-            <a:off x="914400" y="1371600"/>
-            <a:ext cx="10058400" cy="5029200"/>
-          </a:xfrm>
-          <a:prstGeom prst="rect">
-            <a:avLst/>
-          </a:prstGeom>
-          <a:noFill/>
-        </p:spPr>
-        <p:txBody>
-          <a:bodyPr wrap="none">
-            <a:spAutoFit/>
-          </a:bodyPr>
-          <a:lstStyle/>
-          <a:p/>
-          <a:p>
-            <a:r>
-              <a:rPr sz="1600">
-                <a:solidFill>
-                  <a:srgbClr val="000000"/>
-                </a:solidFill>
-              </a:rPr>
-              <a:t>掌握核心概念</a:t>
-            </a:r>
-          </a:p>
-          <a:p>
-            <a:r>
-              <a:rPr sz="1600">
-                <a:solidFill>
-                  <a:srgbClr val="000000"/>
-                </a:solidFill>
-              </a:rPr>
-              <a:t>多做练习</a:t>
-            </a:r>
-          </a:p>
-          <a:p>
-            <a:r>
-              <a:rPr sz="1600">
-                <a:solidFill>
-                  <a:srgbClr val="000000"/>
-                </a:solidFill>
-              </a:rPr>
-              <a:t>注意边界条件</a:t>
-            </a:r>
-          </a:p>
-          <a:p>
-            <a:r>
-              <a:rPr sz="1600">
-                <a:solidFill>
-                  <a:srgbClr val="000000"/>
-                </a:solidFill>
-              </a:rPr>
-              <a:t>理解算法思想而非死记代码</a:t>
+              <a:t>遇到问题先画图、再想算法、最后写代码</a:t>
             </a:r>
           </a:p>
         </p:txBody>

--- a/textbook/ppt/chapter04_ppt.pptx
+++ b/textbook/ppt/chapter04_ppt.pptx
@@ -12,6 +12,7 @@
     <p:sldId id="260" r:id="rId11"/>
     <p:sldId id="261" r:id="rId12"/>
     <p:sldId id="262" r:id="rId13"/>
+    <p:sldId id="263" r:id="rId14"/>
   </p:sldIdLst>
   <p:sldSz cx="12188952" cy="6858000" type="screen4x3"/>
   <p:notesSz cx="6858000" cy="9144000"/>
@@ -3754,6 +3755,91 @@
                 </a:solidFill>
               </a:rPr>
               <a:t>遇到问题先画图、再想算法、最后写代码</a:t>
+            </a:r>
+          </a:p>
+        </p:txBody>
+      </p:sp>
+    </p:spTree>
+  </p:cSld>
+  <p:clrMapOvr>
+    <a:masterClrMapping/>
+  </p:clrMapOvr>
+</p:sld>
+</file>
+
+<file path=ppt/slides/slide8.xml><?xml version="1.0" encoding="utf-8"?>
+<p:sld xmlns:a="http://schemas.openxmlformats.org/drawingml/2006/main" xmlns:p="http://schemas.openxmlformats.org/presentationml/2006/main" xmlns:r="http://schemas.openxmlformats.org/officeDocument/2006/relationships">
+  <p:cSld>
+    <p:spTree>
+      <p:nvGrpSpPr>
+        <p:cNvPr id="1" name=""/>
+        <p:cNvGrpSpPr/>
+        <p:nvPr/>
+      </p:nvGrpSpPr>
+      <p:grpSpPr/>
+      <p:sp>
+        <p:nvSpPr>
+          <p:cNvPr id="2" name="TextBox 1"/>
+          <p:cNvSpPr txBox="1"/>
+          <p:nvPr/>
+        </p:nvSpPr>
+        <p:spPr>
+          <a:xfrm>
+            <a:off x="457200" y="274320"/>
+            <a:ext cx="10972800" cy="731520"/>
+          </a:xfrm>
+          <a:prstGeom prst="rect">
+            <a:avLst/>
+          </a:prstGeom>
+          <a:noFill/>
+        </p:spPr>
+        <p:txBody>
+          <a:bodyPr wrap="none">
+            <a:spAutoFit/>
+          </a:bodyPr>
+          <a:lstStyle/>
+          <a:p>
+            <a:r>
+              <a:rPr sz="2400" b="1">
+                <a:solidFill>
+                  <a:srgbClr val="8B0000"/>
+                </a:solidFill>
+              </a:rPr>
+              <a:t>本章概览</a:t>
+            </a:r>
+          </a:p>
+        </p:txBody>
+      </p:sp>
+      <p:sp>
+        <p:nvSpPr>
+          <p:cNvPr id="3" name="TextBox 2"/>
+          <p:cNvSpPr txBox="1"/>
+          <p:nvPr/>
+        </p:nvSpPr>
+        <p:spPr>
+          <a:xfrm>
+            <a:off x="457200" y="1097280"/>
+            <a:ext cx="10972800" cy="5029200"/>
+          </a:xfrm>
+          <a:prstGeom prst="rect">
+            <a:avLst/>
+          </a:prstGeom>
+          <a:noFill/>
+        </p:spPr>
+        <p:txBody>
+          <a:bodyPr wrap="none">
+            <a:spAutoFit/>
+          </a:bodyPr>
+          <a:lstStyle/>
+          <a:p/>
+          <a:p>
+            <a:r>
+              <a:rPr sz="1600">
+                <a:solidFill>
+                  <a:srgbClr val="000000"/>
+                </a:solidFill>
+              </a:rPr>
+              <a:t>本章学习数组——存储和管理一组有序数据。这是数据结构的入门。</a:t>
             </a:r>
           </a:p>
         </p:txBody>

--- a/textbook/ppt/chapter04_ppt.pptx
+++ b/textbook/ppt/chapter04_ppt.pptx
@@ -13,6 +13,7 @@
     <p:sldId id="261" r:id="rId12"/>
     <p:sldId id="262" r:id="rId13"/>
     <p:sldId id="263" r:id="rId14"/>
+    <p:sldId id="264" r:id="rId15"/>
   </p:sldIdLst>
   <p:sldSz cx="12188952" cy="6858000" type="screen4x3"/>
   <p:notesSz cx="6858000" cy="9144000"/>
@@ -3724,7 +3725,7 @@
                   <a:srgbClr val="000000"/>
                 </a:solidFill>
               </a:rPr>
-              <a:t>本章学习了第4章的核心概念</a:t>
+              <a:t/>
             </a:r>
           </a:p>
           <a:p>
@@ -3734,7 +3735,7 @@
                   <a:srgbClr val="000000"/>
                 </a:solidFill>
               </a:rPr>
-              <a:t>多做练习是掌握算法的关键</a:t>
+              <a:t/>
             </a:r>
           </a:p>
           <a:p>
@@ -3744,7 +3745,7 @@
                   <a:srgbClr val="000000"/>
                 </a:solidFill>
               </a:rPr>
-              <a:t>理解算法思想比死记代码更重要</a:t>
+              <a:t/>
             </a:r>
           </a:p>
           <a:p>
@@ -3754,7 +3755,7 @@
                   <a:srgbClr val="000000"/>
                 </a:solidFill>
               </a:rPr>
-              <a:t>遇到问题先画图、再想算法、最后写代码</a:t>
+              <a:t/>
             </a:r>
           </a:p>
         </p:txBody>
@@ -3840,6 +3841,121 @@
                 </a:solidFill>
               </a:rPr>
               <a:t>本章学习数组——存储和管理一组有序数据。这是数据结构的入门。</a:t>
+            </a:r>
+          </a:p>
+        </p:txBody>
+      </p:sp>
+    </p:spTree>
+  </p:cSld>
+  <p:clrMapOvr>
+    <a:masterClrMapping/>
+  </p:clrMapOvr>
+</p:sld>
+</file>
+
+<file path=ppt/slides/slide9.xml><?xml version="1.0" encoding="utf-8"?>
+<p:sld xmlns:a="http://schemas.openxmlformats.org/drawingml/2006/main" xmlns:p="http://schemas.openxmlformats.org/presentationml/2006/main" xmlns:r="http://schemas.openxmlformats.org/officeDocument/2006/relationships">
+  <p:cSld>
+    <p:spTree>
+      <p:nvGrpSpPr>
+        <p:cNvPr id="1" name=""/>
+        <p:cNvGrpSpPr/>
+        <p:nvPr/>
+      </p:nvGrpSpPr>
+      <p:grpSpPr/>
+      <p:sp>
+        <p:nvSpPr>
+          <p:cNvPr id="2" name="TextBox 1"/>
+          <p:cNvSpPr txBox="1"/>
+          <p:nvPr/>
+        </p:nvSpPr>
+        <p:spPr>
+          <a:xfrm>
+            <a:off x="457200" y="274320"/>
+            <a:ext cx="10972800" cy="731520"/>
+          </a:xfrm>
+          <a:prstGeom prst="rect">
+            <a:avLst/>
+          </a:prstGeom>
+          <a:noFill/>
+        </p:spPr>
+        <p:txBody>
+          <a:bodyPr wrap="none">
+            <a:spAutoFit/>
+          </a:bodyPr>
+          <a:lstStyle/>
+          <a:p>
+            <a:r>
+              <a:rPr sz="2400" b="1">
+                <a:solidFill>
+                  <a:srgbClr val="8B0000"/>
+                </a:solidFill>
+              </a:rPr>
+              <a:t>第4章 核心要点</a:t>
+            </a:r>
+          </a:p>
+        </p:txBody>
+      </p:sp>
+      <p:sp>
+        <p:nvSpPr>
+          <p:cNvPr id="3" name="TextBox 2"/>
+          <p:cNvSpPr txBox="1"/>
+          <p:nvPr/>
+        </p:nvSpPr>
+        <p:spPr>
+          <a:xfrm>
+            <a:off x="457200" y="1097280"/>
+            <a:ext cx="10972800" cy="5029200"/>
+          </a:xfrm>
+          <a:prstGeom prst="rect">
+            <a:avLst/>
+          </a:prstGeom>
+          <a:noFill/>
+        </p:spPr>
+        <p:txBody>
+          <a:bodyPr wrap="none">
+            <a:spAutoFit/>
+          </a:bodyPr>
+          <a:lstStyle/>
+          <a:p/>
+          <a:p>
+            <a:r>
+              <a:rPr sz="1600">
+                <a:solidFill>
+                  <a:srgbClr val="000000"/>
+                </a:solidFill>
+              </a:rPr>
+              <a:t>• 数组的声明、初始化和遍历</a:t>
+            </a:r>
+          </a:p>
+          <a:p>
+            <a:r>
+              <a:rPr sz="1600">
+                <a:solidFill>
+                  <a:srgbClr val="000000"/>
+                </a:solidFill>
+              </a:rPr>
+              <a:t>• 下标从0开始的重要性</a:t>
+            </a:r>
+          </a:p>
+          <a:p>
+            <a:r>
+              <a:rPr sz="1600">
+                <a:solidFill>
+                  <a:srgbClr val="000000"/>
+                </a:solidFill>
+              </a:rPr>
+              <a:t>• 数组越界是未定义行为</a:t>
+            </a:r>
+          </a:p>
+          <a:p>
+            <a:r>
+              <a:rPr sz="1600">
+                <a:solidFill>
+                  <a:srgbClr val="000000"/>
+                </a:solidFill>
+              </a:rPr>
+              <a:t>• 排序函数 sort() 的使用</a:t>
             </a:r>
           </a:p>
         </p:txBody>
